--- a/6_3Network Communication_TEKNIK KOMUNIKASI DATA DIGITAL.pptx
+++ b/6_3Network Communication_TEKNIK KOMUNIKASI DATA DIGITAL.pptx
@@ -252,7 +252,7 @@
           <a:p>
             <a:fld id="{A5AA3E45-57A9-44A4-8D02-ECC452318D6C}" type="datetimeFigureOut">
               <a:rPr lang="en-US" smtClean="0"/>
-              <a:t>2/26/2025</a:t>
+              <a:t>5/5/2025</a:t>
             </a:fld>
             <a:endParaRPr lang="en-US"/>
           </a:p>
@@ -693,7 +693,7 @@
         <p:nvSpPr>
           <p:cNvPr id="22531" name="Rectangle 2"/>
           <p:cNvSpPr>
-            <a:spLocks noRot="1" noChangeArrowheads="1" noTextEdit="1"/>
+            <a:spLocks noGrp="1" noRot="1" noChangeAspect="1" noChangeArrowheads="1" noTextEdit="1"/>
           </p:cNvSpPr>
           <p:nvPr>
             <p:ph type="sldImg"/>
@@ -933,7 +933,7 @@
         <p:nvSpPr>
           <p:cNvPr id="23555" name="Rectangle 2"/>
           <p:cNvSpPr>
-            <a:spLocks noRot="1" noChangeArrowheads="1" noTextEdit="1"/>
+            <a:spLocks noGrp="1" noRot="1" noChangeAspect="1" noChangeArrowheads="1" noTextEdit="1"/>
           </p:cNvSpPr>
           <p:nvPr>
             <p:ph type="sldImg"/>
@@ -1173,7 +1173,7 @@
         <p:nvSpPr>
           <p:cNvPr id="24579" name="Rectangle 2"/>
           <p:cNvSpPr>
-            <a:spLocks noRot="1" noChangeArrowheads="1" noTextEdit="1"/>
+            <a:spLocks noGrp="1" noRot="1" noChangeAspect="1" noChangeArrowheads="1" noTextEdit="1"/>
           </p:cNvSpPr>
           <p:nvPr>
             <p:ph type="sldImg"/>
@@ -1413,7 +1413,7 @@
         <p:nvSpPr>
           <p:cNvPr id="25603" name="Rectangle 2"/>
           <p:cNvSpPr>
-            <a:spLocks noRot="1" noChangeArrowheads="1" noTextEdit="1"/>
+            <a:spLocks noGrp="1" noRot="1" noChangeAspect="1" noChangeArrowheads="1" noTextEdit="1"/>
           </p:cNvSpPr>
           <p:nvPr>
             <p:ph type="sldImg"/>
@@ -1653,7 +1653,7 @@
         <p:nvSpPr>
           <p:cNvPr id="26627" name="Rectangle 2"/>
           <p:cNvSpPr>
-            <a:spLocks noRot="1" noChangeArrowheads="1" noTextEdit="1"/>
+            <a:spLocks noGrp="1" noRot="1" noChangeAspect="1" noChangeArrowheads="1" noTextEdit="1"/>
           </p:cNvSpPr>
           <p:nvPr>
             <p:ph type="sldImg"/>
@@ -1851,7 +1851,7 @@
           <a:p>
             <a:fld id="{6F28CD25-4015-481E-94C9-A931395C8E35}" type="datetimeFigureOut">
               <a:rPr lang="en-US" smtClean="0"/>
-              <a:t>2/26/2025</a:t>
+              <a:t>5/5/2025</a:t>
             </a:fld>
             <a:endParaRPr lang="en-US"/>
           </a:p>
@@ -2021,7 +2021,7 @@
           <a:p>
             <a:fld id="{6F28CD25-4015-481E-94C9-A931395C8E35}" type="datetimeFigureOut">
               <a:rPr lang="en-US" smtClean="0"/>
-              <a:t>2/26/2025</a:t>
+              <a:t>5/5/2025</a:t>
             </a:fld>
             <a:endParaRPr lang="en-US"/>
           </a:p>
@@ -2201,7 +2201,7 @@
           <a:p>
             <a:fld id="{6F28CD25-4015-481E-94C9-A931395C8E35}" type="datetimeFigureOut">
               <a:rPr lang="en-US" smtClean="0"/>
-              <a:t>2/26/2025</a:t>
+              <a:t>5/5/2025</a:t>
             </a:fld>
             <a:endParaRPr lang="en-US"/>
           </a:p>
@@ -2371,7 +2371,7 @@
           <a:p>
             <a:fld id="{6F28CD25-4015-481E-94C9-A931395C8E35}" type="datetimeFigureOut">
               <a:rPr lang="en-US" smtClean="0"/>
-              <a:t>2/26/2025</a:t>
+              <a:t>5/5/2025</a:t>
             </a:fld>
             <a:endParaRPr lang="en-US"/>
           </a:p>
@@ -2617,7 +2617,7 @@
           <a:p>
             <a:fld id="{6F28CD25-4015-481E-94C9-A931395C8E35}" type="datetimeFigureOut">
               <a:rPr lang="en-US" smtClean="0"/>
-              <a:t>2/26/2025</a:t>
+              <a:t>5/5/2025</a:t>
             </a:fld>
             <a:endParaRPr lang="en-US"/>
           </a:p>
@@ -2849,7 +2849,7 @@
           <a:p>
             <a:fld id="{6F28CD25-4015-481E-94C9-A931395C8E35}" type="datetimeFigureOut">
               <a:rPr lang="en-US" smtClean="0"/>
-              <a:t>2/26/2025</a:t>
+              <a:t>5/5/2025</a:t>
             </a:fld>
             <a:endParaRPr lang="en-US"/>
           </a:p>
@@ -3216,7 +3216,7 @@
           <a:p>
             <a:fld id="{6F28CD25-4015-481E-94C9-A931395C8E35}" type="datetimeFigureOut">
               <a:rPr lang="en-US" smtClean="0"/>
-              <a:t>2/26/2025</a:t>
+              <a:t>5/5/2025</a:t>
             </a:fld>
             <a:endParaRPr lang="en-US"/>
           </a:p>
@@ -3334,7 +3334,7 @@
           <a:p>
             <a:fld id="{6F28CD25-4015-481E-94C9-A931395C8E35}" type="datetimeFigureOut">
               <a:rPr lang="en-US" smtClean="0"/>
-              <a:t>2/26/2025</a:t>
+              <a:t>5/5/2025</a:t>
             </a:fld>
             <a:endParaRPr lang="en-US"/>
           </a:p>
@@ -3429,7 +3429,7 @@
           <a:p>
             <a:fld id="{6F28CD25-4015-481E-94C9-A931395C8E35}" type="datetimeFigureOut">
               <a:rPr lang="en-US" smtClean="0"/>
-              <a:t>2/26/2025</a:t>
+              <a:t>5/5/2025</a:t>
             </a:fld>
             <a:endParaRPr lang="en-US"/>
           </a:p>
@@ -3706,7 +3706,7 @@
           <a:p>
             <a:fld id="{6F28CD25-4015-481E-94C9-A931395C8E35}" type="datetimeFigureOut">
               <a:rPr lang="en-US" smtClean="0"/>
-              <a:t>2/26/2025</a:t>
+              <a:t>5/5/2025</a:t>
             </a:fld>
             <a:endParaRPr lang="en-US"/>
           </a:p>
@@ -3963,7 +3963,7 @@
           <a:p>
             <a:fld id="{6F28CD25-4015-481E-94C9-A931395C8E35}" type="datetimeFigureOut">
               <a:rPr lang="en-US" smtClean="0"/>
-              <a:t>2/26/2025</a:t>
+              <a:t>5/5/2025</a:t>
             </a:fld>
             <a:endParaRPr lang="en-US"/>
           </a:p>
@@ -4176,7 +4176,7 @@
           <a:p>
             <a:fld id="{6F28CD25-4015-481E-94C9-A931395C8E35}" type="datetimeFigureOut">
               <a:rPr lang="en-US" smtClean="0"/>
-              <a:t>2/26/2025</a:t>
+              <a:t>5/5/2025</a:t>
             </a:fld>
             <a:endParaRPr lang="en-US"/>
           </a:p>
@@ -6667,7 +6667,7 @@
         <p:spPr bwMode="auto">
           <a:xfrm>
             <a:off x="633845" y="500064"/>
-            <a:ext cx="9576955" cy="5367337"/>
+            <a:ext cx="11168949" cy="5367337"/>
           </a:xfrm>
           <a:noFill/>
           <a:extLst>
@@ -6777,8 +6777,8 @@
         </p:nvSpPr>
         <p:spPr bwMode="auto">
           <a:xfrm>
-            <a:off x="841664" y="571500"/>
-            <a:ext cx="9369136" cy="5295900"/>
+            <a:off x="841663" y="571500"/>
+            <a:ext cx="11186213" cy="5295900"/>
           </a:xfrm>
           <a:noFill/>
           <a:extLst>
@@ -7439,13 +7439,8 @@
             <a:pPr eaLnBrk="1" hangingPunct="1"/>
             <a:r>
               <a:rPr lang="id-ID" altLang="en-US" dirty="0" smtClean="0"/>
-              <a:t>Keuntungan dari Komunikasi Digital </a:t>
-            </a:r>
-            <a:r>
-              <a:rPr lang="id-ID" altLang="en-US" dirty="0" smtClean="0"/>
-              <a:t>:</a:t>
-            </a:r>
-            <a:endParaRPr lang="id-ID" altLang="en-US" dirty="0" smtClean="0"/>
+              <a:t>Keuntungan dari Komunikasi Digital :</a:t>
+            </a:r>
           </a:p>
           <a:p>
             <a:pPr marL="971550" lvl="1" indent="-514350">
@@ -7454,11 +7449,7 @@
             </a:pPr>
             <a:r>
               <a:rPr lang="id-ID" altLang="en-US" dirty="0" smtClean="0"/>
-              <a:t>Error </a:t>
-            </a:r>
-            <a:r>
-              <a:rPr lang="id-ID" altLang="en-US" dirty="0" smtClean="0"/>
-              <a:t>hamp</a:t>
+              <a:t>Error hamp</a:t>
             </a:r>
             <a:r>
               <a:rPr lang="en-US" altLang="en-US" dirty="0" err="1" smtClean="0"/>
@@ -7466,11 +7457,7 @@
             </a:r>
             <a:r>
               <a:rPr lang="id-ID" altLang="en-US" dirty="0" smtClean="0"/>
-              <a:t>r </a:t>
-            </a:r>
-            <a:r>
-              <a:rPr lang="id-ID" altLang="en-US" dirty="0" smtClean="0"/>
-              <a:t>selalu dapat dikoreksi.</a:t>
+              <a:t>r selalu dapat dikoreksi.</a:t>
             </a:r>
           </a:p>
           <a:p>
@@ -7594,13 +7581,8 @@
             <a:pPr eaLnBrk="1" hangingPunct="1"/>
             <a:r>
               <a:rPr lang="id-ID" altLang="en-US" dirty="0" smtClean="0"/>
-              <a:t>Sedangkan kerugian dari komunikasi digital </a:t>
-            </a:r>
-            <a:r>
-              <a:rPr lang="id-ID" altLang="en-US" dirty="0" smtClean="0"/>
-              <a:t>:</a:t>
-            </a:r>
-            <a:endParaRPr lang="id-ID" altLang="en-US" dirty="0" smtClean="0"/>
+              <a:t>Sedangkan kerugian dari komunikasi digital :</a:t>
+            </a:r>
           </a:p>
           <a:p>
             <a:pPr marL="914400" lvl="1" indent="-514350">
@@ -8117,7 +8099,7 @@
         <p:nvPicPr>
           <p:cNvPr id="5124" name="Picture 4"/>
           <p:cNvPicPr>
-            <a:picLocks noChangeAspect="1" noChangeArrowheads="1"/>
+            <a:picLocks noGrp="1" noChangeAspect="1" noChangeArrowheads="1"/>
           </p:cNvPicPr>
           <p:nvPr>
             <p:ph type="body" idx="1"/>
@@ -9653,7 +9635,7 @@
         <p:nvPicPr>
           <p:cNvPr id="9220" name="Picture 4"/>
           <p:cNvPicPr>
-            <a:picLocks noChangeAspect="1" noChangeArrowheads="1"/>
+            <a:picLocks noGrp="1" noChangeAspect="1" noChangeArrowheads="1"/>
           </p:cNvPicPr>
           <p:nvPr>
             <p:ph type="body" idx="1"/>
@@ -9934,7 +9916,7 @@
         <p:nvPicPr>
           <p:cNvPr id="11268" name="Picture 4"/>
           <p:cNvPicPr>
-            <a:picLocks noChangeAspect="1" noChangeArrowheads="1"/>
+            <a:picLocks noGrp="1" noChangeAspect="1" noChangeArrowheads="1"/>
           </p:cNvPicPr>
           <p:nvPr>
             <p:ph type="body" idx="1"/>
@@ -9972,6 +9954,13 @@
   <p:clrMapOvr>
     <a:masterClrMapping/>
   </p:clrMapOvr>
+  <p:timing>
+    <p:tnLst>
+      <p:par>
+        <p:cTn id="1" dur="indefinite" restart="never" nodeType="tmRoot"/>
+      </p:par>
+    </p:tnLst>
+  </p:timing>
 </p:sld>
 </file>
 
@@ -10358,7 +10347,7 @@
         <p:nvPicPr>
           <p:cNvPr id="15364" name="Picture 4"/>
           <p:cNvPicPr>
-            <a:picLocks noChangeAspect="1" noChangeArrowheads="1"/>
+            <a:picLocks noGrp="1" noChangeAspect="1" noChangeArrowheads="1"/>
           </p:cNvPicPr>
           <p:nvPr>
             <p:ph type="body" idx="1"/>
@@ -11679,7 +11668,7 @@
         <p:nvPicPr>
           <p:cNvPr id="19460" name="Picture 4"/>
           <p:cNvPicPr>
-            <a:picLocks noChangeAspect="1" noChangeArrowheads="1"/>
+            <a:picLocks noGrp="1" noChangeAspect="1" noChangeArrowheads="1"/>
           </p:cNvPicPr>
           <p:nvPr>
             <p:ph type="body" idx="1"/>
@@ -11930,7 +11919,7 @@
         <p:nvPicPr>
           <p:cNvPr id="21508" name="Picture 4"/>
           <p:cNvPicPr>
-            <a:picLocks noChangeAspect="1" noChangeArrowheads="1"/>
+            <a:picLocks noGrp="1" noChangeAspect="1" noChangeArrowheads="1"/>
           </p:cNvPicPr>
           <p:nvPr>
             <p:ph type="body" idx="1"/>
@@ -12344,7 +12333,7 @@
         <p:nvPicPr>
           <p:cNvPr id="24580" name="Picture 4"/>
           <p:cNvPicPr>
-            <a:picLocks noChangeAspect="1" noChangeArrowheads="1"/>
+            <a:picLocks noGrp="1" noChangeAspect="1" noChangeArrowheads="1"/>
           </p:cNvPicPr>
           <p:nvPr>
             <p:ph type="body" idx="1"/>
@@ -12382,6 +12371,13 @@
   <p:clrMapOvr>
     <a:masterClrMapping/>
   </p:clrMapOvr>
+  <p:timing>
+    <p:tnLst>
+      <p:par>
+        <p:cTn id="1" dur="indefinite" restart="never" nodeType="tmRoot"/>
+      </p:par>
+    </p:tnLst>
+  </p:timing>
 </p:sld>
 </file>
 
@@ -13199,6 +13195,13 @@
   <p:clrMapOvr>
     <a:masterClrMapping/>
   </p:clrMapOvr>
+  <p:timing>
+    <p:tnLst>
+      <p:par>
+        <p:cTn id="1" dur="indefinite" restart="never" nodeType="tmRoot"/>
+      </p:par>
+    </p:tnLst>
+  </p:timing>
 </p:sld>
 </file>
 
@@ -13245,7 +13248,7 @@
         <p:nvPicPr>
           <p:cNvPr id="27652" name="Picture 4"/>
           <p:cNvPicPr>
-            <a:picLocks noChangeAspect="1" noChangeArrowheads="1"/>
+            <a:picLocks noGrp="1" noChangeAspect="1" noChangeArrowheads="1"/>
           </p:cNvPicPr>
           <p:nvPr>
             <p:ph type="body" idx="1"/>
@@ -13496,7 +13499,7 @@
         <p:nvPicPr>
           <p:cNvPr id="29700" name="Picture 4"/>
           <p:cNvPicPr>
-            <a:picLocks noChangeAspect="1" noChangeArrowheads="1"/>
+            <a:picLocks noGrp="1" noChangeAspect="1" noChangeArrowheads="1"/>
           </p:cNvPicPr>
           <p:nvPr>
             <p:ph type="body" idx="1"/>
@@ -13587,7 +13590,7 @@
         <p:nvPicPr>
           <p:cNvPr id="30724" name="Picture 4"/>
           <p:cNvPicPr>
-            <a:picLocks noChangeAspect="1" noChangeArrowheads="1"/>
+            <a:picLocks noGrp="1" noChangeAspect="1" noChangeArrowheads="1"/>
           </p:cNvPicPr>
           <p:nvPr>
             <p:ph type="body" idx="1"/>
@@ -13678,7 +13681,7 @@
         <p:nvPicPr>
           <p:cNvPr id="31748" name="Picture 4"/>
           <p:cNvPicPr>
-            <a:picLocks noChangeAspect="1" noChangeArrowheads="1"/>
+            <a:picLocks noGrp="1" noChangeAspect="1" noChangeArrowheads="1"/>
           </p:cNvPicPr>
           <p:nvPr>
             <p:ph type="body" idx="1"/>
@@ -13769,7 +13772,7 @@
         <p:nvPicPr>
           <p:cNvPr id="32772" name="Picture 4"/>
           <p:cNvPicPr>
-            <a:picLocks noChangeAspect="1" noChangeArrowheads="1"/>
+            <a:picLocks noGrp="1" noChangeAspect="1" noChangeArrowheads="1"/>
           </p:cNvPicPr>
           <p:nvPr>
             <p:ph type="body" idx="1"/>
@@ -13860,7 +13863,7 @@
         <p:nvPicPr>
           <p:cNvPr id="33796" name="Picture 4"/>
           <p:cNvPicPr>
-            <a:picLocks noChangeAspect="1" noChangeArrowheads="1"/>
+            <a:picLocks noGrp="1" noChangeAspect="1" noChangeArrowheads="1"/>
           </p:cNvPicPr>
           <p:nvPr>
             <p:ph type="body" idx="1"/>
@@ -13997,6 +14000,13 @@
   <p:clrMapOvr>
     <a:masterClrMapping/>
   </p:clrMapOvr>
+  <p:timing>
+    <p:tnLst>
+      <p:par>
+        <p:cTn id="1" dur="indefinite" restart="never" nodeType="tmRoot"/>
+      </p:par>
+    </p:tnLst>
+  </p:timing>
 </p:sld>
 </file>
 
@@ -14396,24 +14406,32 @@
           <a:lstStyle/>
           <a:p>
             <a:r>
-              <a:rPr lang="en-US" altLang="en-US"/>
-              <a:t>Stallings bab 6</a:t>
-            </a:r>
-          </a:p>
-          <a:p>
-            <a:r>
-              <a:rPr lang="en-US" altLang="en-US"/>
+              <a:rPr lang="en-US" altLang="en-US" dirty="0"/>
+              <a:t>Stallings </a:t>
+            </a:r>
+            <a:r>
+              <a:rPr lang="en-US" altLang="en-US" dirty="0" err="1"/>
+              <a:t>bab</a:t>
+            </a:r>
+            <a:r>
+              <a:rPr lang="en-US" altLang="en-US" dirty="0"/>
+              <a:t> 6</a:t>
+            </a:r>
+          </a:p>
+          <a:p>
+            <a:r>
+              <a:rPr lang="en-US" altLang="en-US" dirty="0"/>
               <a:t>Web pages from ITU-T on v. specification</a:t>
             </a:r>
           </a:p>
           <a:p>
             <a:r>
-              <a:rPr lang="en-US" altLang="en-US"/>
+              <a:rPr lang="en-US" altLang="en-US" dirty="0"/>
               <a:t>Web pages on ISDN</a:t>
             </a:r>
           </a:p>
           <a:p>
-            <a:endParaRPr lang="en-US" altLang="en-US"/>
+            <a:endParaRPr lang="en-US" altLang="en-US" dirty="0"/>
           </a:p>
         </p:txBody>
       </p:sp>
